--- a/courses/learn_partitioning/module02-03-fm-partition/slides.pptx
+++ b/courses/learn_partitioning/module02-03-fm-partition/slides.pptx
@@ -16,6 +16,9 @@
     <p:sldId id="264" r:id="rId16"/>
     <p:sldId id="265" r:id="rId17"/>
     <p:sldId id="266" r:id="rId18"/>
+    <p:sldId id="267" r:id="rId19"/>
+    <p:sldId id="268" r:id="rId20"/>
+    <p:sldId id="269" r:id="rId21"/>
   </p:sldIdLst>
   <p:sldSz cx="12191695" cy="6858000" type="screen4x3"/>
   <p:notesSz cx="6858000" cy="9144000"/>
@@ -582,7 +585,7 @@
           <a:lstStyle/>
           <a:p>
             <a:r>
-              <a:t>Common traps: optimizing cut while ignoring balance; reporting pairwise cut when the instance is a hypergraph; flipping locked terminals; and stopping before rollback to the best KL or FM prefix. For multilevel flows, verify coarsening before you blame the refiner.</a:t>
+              <a:t>In the browser lab track, open the **fm-partition** lab from the tools shelf. Load the starter graph, run the algorithm once, and read cutsize and balance in the metrics panel. Work the challenges that lock the goldens, then come back to implement the same loop yourself.</a:t>
             </a:r>
           </a:p>
         </p:txBody>
@@ -652,6 +655,146 @@
           <a:lstStyle/>
           <a:p>
             <a:r>
+              <a:t>In the implement track, open this module's EXAMPLES.md Pseudocode section and the course common solvers. Parse the tiny graph, run the algorithm with a deterministic seed, and print the assignment plus cutsize and balance. Match the browser goldens before you claim the checklist.</a:t>
+            </a:r>
+          </a:p>
+        </p:txBody>
+      </p:sp>
+      <p:sp>
+        <p:nvSpPr>
+          <p:cNvPr id="4" name="Slide Number Placeholder 3"/>
+          <p:cNvSpPr>
+            <a:spLocks noGrp="1"/>
+          </p:cNvSpPr>
+          <p:nvPr>
+            <p:ph type="sldNum" idx="5" sz="quarter"/>
+          </p:nvPr>
+        </p:nvSpPr>
+        <p:spPr/>
+      </p:sp>
+    </p:spTree>
+  </p:cSld>
+  <p:clrMapOvr>
+    <a:masterClrMapping/>
+  </p:clrMapOvr>
+</p:notes>
+</file>
+
+<file path=ppt/notesSlides/notesSlide12.xml><?xml version="1.0" encoding="utf-8"?>
+<p:notes xmlns:a="http://schemas.openxmlformats.org/drawingml/2006/main" xmlns:p="http://schemas.openxmlformats.org/presentationml/2006/main" xmlns:r="http://schemas.openxmlformats.org/officeDocument/2006/relationships">
+  <p:cSld>
+    <p:spTree>
+      <p:nvGrpSpPr>
+        <p:cNvPr id="1" name=""/>
+        <p:cNvGrpSpPr/>
+        <p:nvPr/>
+      </p:nvGrpSpPr>
+      <p:grpSpPr>
+        <a:xfrm>
+          <a:off x="0" y="0"/>
+          <a:ext cx="0" cy="0"/>
+          <a:chOff x="0" y="0"/>
+          <a:chExt cx="0" cy="0"/>
+        </a:xfrm>
+      </p:grpSpPr>
+      <p:sp>
+        <p:nvSpPr>
+          <p:cNvPr id="2" name="Slide Image Placeholder 1"/>
+          <p:cNvSpPr>
+            <a:spLocks noGrp="1"/>
+          </p:cNvSpPr>
+          <p:nvPr>
+            <p:ph type="sldImg" idx="2"/>
+          </p:nvPr>
+        </p:nvSpPr>
+        <p:spPr/>
+      </p:sp>
+      <p:sp>
+        <p:nvSpPr>
+          <p:cNvPr id="3" name="Notes Placeholder 2"/>
+          <p:cNvSpPr>
+            <a:spLocks noGrp="1"/>
+          </p:cNvSpPr>
+          <p:nvPr>
+            <p:ph type="body" idx="3" sz="quarter"/>
+          </p:nvPr>
+        </p:nvSpPr>
+        <p:spPr/>
+        <p:txBody>
+          <a:bodyPr/>
+          <a:lstStyle/>
+          <a:p>
+            <a:r>
+              <a:t>Common traps: optimizing cut while ignoring balance; reporting pairwise cut when the instance is a hypergraph; flipping locked terminals; and stopping before rollback to the best KL or FM prefix. For multilevel flows, verify coarsening before you blame the refiner.</a:t>
+            </a:r>
+          </a:p>
+        </p:txBody>
+      </p:sp>
+      <p:sp>
+        <p:nvSpPr>
+          <p:cNvPr id="4" name="Slide Number Placeholder 3"/>
+          <p:cNvSpPr>
+            <a:spLocks noGrp="1"/>
+          </p:cNvSpPr>
+          <p:nvPr>
+            <p:ph type="sldNum" idx="5" sz="quarter"/>
+          </p:nvPr>
+        </p:nvSpPr>
+        <p:spPr/>
+      </p:sp>
+    </p:spTree>
+  </p:cSld>
+  <p:clrMapOvr>
+    <a:masterClrMapping/>
+  </p:clrMapOvr>
+</p:notes>
+</file>
+
+<file path=ppt/notesSlides/notesSlide13.xml><?xml version="1.0" encoding="utf-8"?>
+<p:notes xmlns:a="http://schemas.openxmlformats.org/drawingml/2006/main" xmlns:p="http://schemas.openxmlformats.org/presentationml/2006/main" xmlns:r="http://schemas.openxmlformats.org/officeDocument/2006/relationships">
+  <p:cSld>
+    <p:spTree>
+      <p:nvGrpSpPr>
+        <p:cNvPr id="1" name=""/>
+        <p:cNvGrpSpPr/>
+        <p:nvPr/>
+      </p:nvGrpSpPr>
+      <p:grpSpPr>
+        <a:xfrm>
+          <a:off x="0" y="0"/>
+          <a:ext cx="0" cy="0"/>
+          <a:chOff x="0" y="0"/>
+          <a:chExt cx="0" cy="0"/>
+        </a:xfrm>
+      </p:grpSpPr>
+      <p:sp>
+        <p:nvSpPr>
+          <p:cNvPr id="2" name="Slide Image Placeholder 1"/>
+          <p:cNvSpPr>
+            <a:spLocks noGrp="1"/>
+          </p:cNvSpPr>
+          <p:nvPr>
+            <p:ph type="sldImg" idx="2"/>
+          </p:nvPr>
+        </p:nvSpPr>
+        <p:spPr/>
+      </p:sp>
+      <p:sp>
+        <p:nvSpPr>
+          <p:cNvPr id="3" name="Notes Placeholder 2"/>
+          <p:cNvSpPr>
+            <a:spLocks noGrp="1"/>
+          </p:cNvSpPr>
+          <p:nvPr>
+            <p:ph type="body" idx="3" sz="quarter"/>
+          </p:nvPr>
+        </p:nvSpPr>
+        <p:spPr/>
+        <p:txBody>
+          <a:bodyPr/>
+          <a:lstStyle/>
+          <a:p>
+            <a:r>
               <a:t>Complete the checklist for at least one track—preferably both. Implement until your metrics match the starter goldens. When you’re ready, take the short quiz, then continue to the next module.</a:t>
             </a:r>
           </a:p>
@@ -725,12 +868,6 @@
               <a:t>Bucketed single-vertex gains, lock after each move, and enforce a balance tolerance so parts cannot empty. Two legal flips can equal one KL swap’s total gain on this instance—different move set, same destination quality.</a:t>
             </a:r>
           </a:p>
-          <a:p/>
-          <a:p>
-            <a:r>
-              <a:t>&lt;!-- algorithm-walkthrough --&gt;</a:t>
-            </a:r>
-          </a:p>
         </p:txBody>
       </p:sp>
       <p:sp>
@@ -798,7 +935,13 @@
           <a:lstStyle/>
           <a:p>
             <a:r>
-              <a:t>FM starts from the same cutsize-12 seed, but moves one vertex at a time instead of swapping a pair. That suits hypergraph / cell-move implementations.</a:t>
+              <a:t>FM moves one vertex at a time. Pseudocode ranks unlocked legal flips by gain, locks them into a sequence, then keeps the best positive prefix under a balance filter.</a:t>
+            </a:r>
+          </a:p>
+          <a:p/>
+          <a:p>
+            <a:r>
+              <a:t>Open this module's examples file and find the Pseudocode section. That written sketch is what you implement on the implement track and what the browser challenges measure.</a:t>
             </a:r>
           </a:p>
         </p:txBody>
@@ -868,7 +1011,7 @@
           <a:lstStyle/>
           <a:p>
             <a:r>
-              <a:t>Highest legal move sends D to the other side with gain 3. Partial progress: D joins E's side early.</a:t>
+              <a:t>Same bad seed as KL: FM flips D then A, keeps a prefix of two, and reaches ABC versus DE at cut three.</a:t>
             </a:r>
           </a:p>
         </p:txBody>
@@ -938,7 +1081,7 @@
           <a:lstStyle/>
           <a:p>
             <a:r>
-              <a:t>Next, A flips with gain 6. Cumulative gain is 3+6=9 — the same total improvement KL found with one swap.</a:t>
+              <a:t>FM starts from the same cutsize-12 seed, but moves one vertex at a time instead of swapping a pair. That suits hypergraph / cell-move implementations.</a:t>
             </a:r>
           </a:p>
         </p:txBody>
@@ -1008,7 +1151,7 @@
           <a:lstStyle/>
           <a:p>
             <a:r>
-              <a:t>FM lands on the same refined bipartition as KL. Teaching point: move style differs, destination quality matches on this instance.</a:t>
+              <a:t>Highest legal move sends D to the other side with gain 3. Partial progress: D joins E's side early.</a:t>
             </a:r>
           </a:p>
         </p:txBody>
@@ -1078,13 +1221,7 @@
           <a:lstStyle/>
           <a:p>
             <a:r>
-              <a:t>A second FM pass finds no improving move prefix. Stop. In real tools, FM often runs inside multilevel V-cycles with tighter balance and hyperedges.</a:t>
-            </a:r>
-          </a:p>
-          <a:p/>
-          <a:p>
-            <a:r>
-              <a:t>&lt;!-- /algorithm-walkthrough --&gt;</a:t>
+              <a:t>Next, A flips with gain 6. Cumulative gain is 3+6=9 — the same total improvement KL found with one swap.</a:t>
             </a:r>
           </a:p>
         </p:txBody>
@@ -1154,7 +1291,7 @@
           <a:lstStyle/>
           <a:p>
             <a:r>
-              <a:t>In the browser lab track, open the **fm-partition** lab from the tools shelf. Load the starter graph, run the algorithm once, and read cutsize and balance in the metrics panel. Work the challenges that lock the goldens, then come back to implement the same loop yourself.</a:t>
+              <a:t>FM lands on the same refined bipartition as KL. Teaching point: move style differs, destination quality matches on this instance.</a:t>
             </a:r>
           </a:p>
         </p:txBody>
@@ -1224,7 +1361,7 @@
           <a:lstStyle/>
           <a:p>
             <a:r>
-              <a:t>In the implement track, open this module’s examples and the course `common/` solvers. Parse the tiny graph, run the algorithm with a deterministic seed, and print the assignment plus cutsize and balance. Match the browser goldens before you claim the checklist.</a:t>
+              <a:t>A second FM pass finds no improving move prefix. Stop. In real tools, FM often runs inside multilevel V-cycles with tighter balance and hyperedges.</a:t>
             </a:r>
           </a:p>
         </p:txBody>
@@ -4382,21 +4519,45 @@
                 </a:solidFill>
                 <a:latin typeface="Calibri"/>
               </a:rPr>
-              <a:t>Pitfalls</a:t>
-            </a:r>
-          </a:p>
-        </p:txBody>
-      </p:sp>
-      <p:sp>
-        <p:nvSpPr>
-          <p:cNvPr id="3" name="TextBox 2"/>
+              <a:t>Pass 1 confirms local optimum</a:t>
+            </a:r>
+          </a:p>
+        </p:txBody>
+      </p:sp>
+      <p:pic>
+        <p:nvPicPr>
+          <p:cNvPr id="3" name="Picture 2" descr="05-pass1-stop.png"/>
+          <p:cNvPicPr>
+            <a:picLocks noChangeAspect="1"/>
+          </p:cNvPicPr>
+          <p:nvPr/>
+        </p:nvPicPr>
+        <p:blipFill>
+          <a:blip r:embed="rId2"/>
+          <a:stretch>
+            <a:fillRect/>
+          </a:stretch>
+        </p:blipFill>
+        <p:spPr>
+          <a:xfrm>
+            <a:off x="548640" y="1143000"/>
+            <a:ext cx="9404113" cy="4572000"/>
+          </a:xfrm>
+          <a:prstGeom prst="rect">
+            <a:avLst/>
+          </a:prstGeom>
+        </p:spPr>
+      </p:pic>
+      <p:sp>
+        <p:nvSpPr>
+          <p:cNvPr id="4" name="TextBox 3"/>
           <p:cNvSpPr txBox="1"/>
           <p:nvPr/>
         </p:nvSpPr>
         <p:spPr>
           <a:xfrm>
-            <a:off x="548640" y="1234440"/>
-            <a:ext cx="11064240" cy="4937760"/>
+            <a:off x="548640" y="5897880"/>
+            <a:ext cx="11064240" cy="411480"/>
           </a:xfrm>
           <a:prstGeom prst="rect">
             <a:avLst/>
@@ -4409,54 +4570,26 @@
           </a:bodyPr>
           <a:lstStyle/>
           <a:p>
-            <a:pPr lvl="0" marL="457200" indent="-228600">
-              <a:buFont typeface="Calibri"/>
-              <a:spcAft>
-                <a:spcPts val="1000"/>
-              </a:spcAft>
-              <a:buSzPct val="100000"/>
-              <a:buChar char="•"/>
+            <a:pPr>
               <a:lnSpc>
                 <a:spcPts val="2200"/>
               </a:lnSpc>
             </a:pPr>
             <a:r>
-              <a:rPr sz="2000" b="0">
+              <a:rPr sz="1200" b="0">
                 <a:solidFill>
                   <a:srgbClr val="333333"/>
                 </a:solidFill>
                 <a:latin typeface="Calibri"/>
               </a:rPr>
-              <a:t>Common traps</a:t>
-            </a:r>
-          </a:p>
-          <a:p>
-            <a:pPr lvl="0" marL="457200" indent="-228600">
-              <a:buFont typeface="Calibri"/>
-              <a:spcAft>
-                <a:spcPts val="1000"/>
-              </a:spcAft>
-              <a:buSzPct val="100000"/>
-              <a:buChar char="•"/>
-              <a:lnSpc>
-                <a:spcPts val="2200"/>
-              </a:lnSpc>
-            </a:pPr>
-            <a:r>
-              <a:rPr sz="2000" b="0">
-                <a:solidFill>
-                  <a:srgbClr val="333333"/>
-                </a:solidFill>
-                <a:latin typeface="Calibri"/>
-              </a:rPr>
-              <a:t>For multilevel flows, verify coarsening before you blame the refiner</a:t>
-            </a:r>
-          </a:p>
-        </p:txBody>
-      </p:sp>
-      <p:sp>
-        <p:nvSpPr>
-          <p:cNvPr id="4" name="TextBox 3"/>
+              <a:t>Pass 1 confirms local optimum</a:t>
+            </a:r>
+          </a:p>
+        </p:txBody>
+      </p:sp>
+      <p:sp>
+        <p:nvSpPr>
+          <p:cNvPr id="5" name="TextBox 4"/>
           <p:cNvSpPr txBox="1"/>
           <p:nvPr/>
         </p:nvSpPr>
@@ -4545,6 +4678,557 @@
                 </a:solidFill>
                 <a:latin typeface="Calibri"/>
               </a:rPr>
+              <a:t>Browser lab track</a:t>
+            </a:r>
+          </a:p>
+        </p:txBody>
+      </p:sp>
+      <p:sp>
+        <p:nvSpPr>
+          <p:cNvPr id="3" name="TextBox 2"/>
+          <p:cNvSpPr txBox="1"/>
+          <p:nvPr/>
+        </p:nvSpPr>
+        <p:spPr>
+          <a:xfrm>
+            <a:off x="548640" y="1234440"/>
+            <a:ext cx="11064240" cy="4937760"/>
+          </a:xfrm>
+          <a:prstGeom prst="rect">
+            <a:avLst/>
+          </a:prstGeom>
+          <a:noFill/>
+        </p:spPr>
+        <p:txBody>
+          <a:bodyPr wrap="square">
+            <a:noAutofit/>
+          </a:bodyPr>
+          <a:lstStyle/>
+          <a:p>
+            <a:pPr lvl="0" marL="457200" indent="-228600">
+              <a:buFont typeface="Calibri"/>
+              <a:spcAft>
+                <a:spcPts val="1000"/>
+              </a:spcAft>
+              <a:buSzPct val="100000"/>
+              <a:buChar char="•"/>
+              <a:lnSpc>
+                <a:spcPts val="2200"/>
+              </a:lnSpc>
+            </a:pPr>
+            <a:r>
+              <a:rPr sz="2000" b="0">
+                <a:solidFill>
+                  <a:srgbClr val="333333"/>
+                </a:solidFill>
+                <a:latin typeface="Calibri"/>
+              </a:rPr>
+              <a:t>In the browser lab track, open the </a:t>
+            </a:r>
+            <a:r>
+              <a:rPr sz="2000" b="1">
+                <a:solidFill>
+                  <a:srgbClr val="333333"/>
+                </a:solidFill>
+                <a:latin typeface="Calibri"/>
+              </a:rPr>
+              <a:t>fm-partition</a:t>
+            </a:r>
+            <a:r>
+              <a:rPr sz="2000" b="0">
+                <a:solidFill>
+                  <a:srgbClr val="333333"/>
+                </a:solidFill>
+                <a:latin typeface="Calibri"/>
+              </a:rPr>
+              <a:t> lab from the tools shelf</a:t>
+            </a:r>
+          </a:p>
+          <a:p>
+            <a:pPr lvl="0" marL="457200" indent="-228600">
+              <a:buFont typeface="Calibri"/>
+              <a:spcAft>
+                <a:spcPts val="1000"/>
+              </a:spcAft>
+              <a:buSzPct val="100000"/>
+              <a:buChar char="•"/>
+              <a:lnSpc>
+                <a:spcPts val="2200"/>
+              </a:lnSpc>
+            </a:pPr>
+            <a:r>
+              <a:rPr sz="2000" b="0">
+                <a:solidFill>
+                  <a:srgbClr val="333333"/>
+                </a:solidFill>
+                <a:latin typeface="Calibri"/>
+              </a:rPr>
+              <a:t>Load the starter graph, run the algorithm once</a:t>
+            </a:r>
+          </a:p>
+          <a:p>
+            <a:pPr lvl="0" marL="457200" indent="-228600">
+              <a:buFont typeface="Calibri"/>
+              <a:spcAft>
+                <a:spcPts val="1000"/>
+              </a:spcAft>
+              <a:buSzPct val="100000"/>
+              <a:buChar char="•"/>
+              <a:lnSpc>
+                <a:spcPts val="2200"/>
+              </a:lnSpc>
+            </a:pPr>
+            <a:r>
+              <a:rPr sz="2000" b="0">
+                <a:solidFill>
+                  <a:srgbClr val="333333"/>
+                </a:solidFill>
+                <a:latin typeface="Calibri"/>
+              </a:rPr>
+              <a:t>Work the challenges that lock the goldens</a:t>
+            </a:r>
+          </a:p>
+        </p:txBody>
+      </p:sp>
+      <p:sp>
+        <p:nvSpPr>
+          <p:cNvPr id="4" name="TextBox 3"/>
+          <p:cNvSpPr txBox="1"/>
+          <p:nvPr/>
+        </p:nvSpPr>
+        <p:spPr>
+          <a:xfrm>
+            <a:off x="548640" y="6355080"/>
+            <a:ext cx="11064240" cy="320040"/>
+          </a:xfrm>
+          <a:prstGeom prst="rect">
+            <a:avLst/>
+          </a:prstGeom>
+          <a:noFill/>
+        </p:spPr>
+        <p:txBody>
+          <a:bodyPr wrap="square">
+            <a:noAutofit/>
+          </a:bodyPr>
+          <a:lstStyle/>
+          <a:p>
+            <a:pPr algn="r">
+              <a:lnSpc>
+                <a:spcPts val="2200"/>
+              </a:lnSpc>
+              <a:defRPr sz="1000" b="0">
+                <a:solidFill>
+                  <a:srgbClr val="666666"/>
+                </a:solidFill>
+                <a:latin typeface="Calibri"/>
+              </a:defRPr>
+            </a:pPr>
+            <a:r>
+              <a:t>learn_partitioning — 03 fm partition</a:t>
+            </a:r>
+          </a:p>
+        </p:txBody>
+      </p:sp>
+    </p:spTree>
+  </p:cSld>
+  <p:clrMapOvr>
+    <a:masterClrMapping/>
+  </p:clrMapOvr>
+</p:sld>
+</file>
+
+<file path=ppt/slides/slide12.xml><?xml version="1.0" encoding="utf-8"?>
+<p:sld xmlns:a="http://schemas.openxmlformats.org/drawingml/2006/main" xmlns:p="http://schemas.openxmlformats.org/presentationml/2006/main" xmlns:r="http://schemas.openxmlformats.org/officeDocument/2006/relationships">
+  <p:cSld>
+    <p:spTree>
+      <p:nvGrpSpPr>
+        <p:cNvPr id="1" name=""/>
+        <p:cNvGrpSpPr/>
+        <p:nvPr/>
+      </p:nvGrpSpPr>
+      <p:grpSpPr/>
+      <p:sp>
+        <p:nvSpPr>
+          <p:cNvPr id="2" name="TextBox 1"/>
+          <p:cNvSpPr txBox="1"/>
+          <p:nvPr/>
+        </p:nvSpPr>
+        <p:spPr>
+          <a:xfrm>
+            <a:off x="548640" y="411480"/>
+            <a:ext cx="11064240" cy="777240"/>
+          </a:xfrm>
+          <a:prstGeom prst="rect">
+            <a:avLst/>
+          </a:prstGeom>
+          <a:noFill/>
+        </p:spPr>
+        <p:txBody>
+          <a:bodyPr wrap="square">
+            <a:noAutofit/>
+          </a:bodyPr>
+          <a:lstStyle/>
+          <a:p>
+            <a:pPr>
+              <a:lnSpc>
+                <a:spcPts val="2200"/>
+              </a:lnSpc>
+            </a:pPr>
+            <a:r>
+              <a:rPr sz="2800" b="1">
+                <a:solidFill>
+                  <a:srgbClr val="1A1A2E"/>
+                </a:solidFill>
+                <a:latin typeface="Calibri"/>
+              </a:rPr>
+              <a:t>Implement track</a:t>
+            </a:r>
+          </a:p>
+        </p:txBody>
+      </p:sp>
+      <p:sp>
+        <p:nvSpPr>
+          <p:cNvPr id="3" name="TextBox 2"/>
+          <p:cNvSpPr txBox="1"/>
+          <p:nvPr/>
+        </p:nvSpPr>
+        <p:spPr>
+          <a:xfrm>
+            <a:off x="548640" y="1234440"/>
+            <a:ext cx="11064240" cy="4937760"/>
+          </a:xfrm>
+          <a:prstGeom prst="rect">
+            <a:avLst/>
+          </a:prstGeom>
+          <a:noFill/>
+        </p:spPr>
+        <p:txBody>
+          <a:bodyPr wrap="square">
+            <a:noAutofit/>
+          </a:bodyPr>
+          <a:lstStyle/>
+          <a:p>
+            <a:pPr lvl="0" marL="457200" indent="-228600">
+              <a:buFont typeface="Calibri"/>
+              <a:spcAft>
+                <a:spcPts val="1000"/>
+              </a:spcAft>
+              <a:buSzPct val="100000"/>
+              <a:buChar char="•"/>
+              <a:lnSpc>
+                <a:spcPts val="2200"/>
+              </a:lnSpc>
+            </a:pPr>
+            <a:r>
+              <a:rPr sz="2000" b="0">
+                <a:solidFill>
+                  <a:srgbClr val="333333"/>
+                </a:solidFill>
+                <a:latin typeface="Calibri"/>
+              </a:rPr>
+              <a:t>In the implement track</a:t>
+            </a:r>
+          </a:p>
+          <a:p>
+            <a:pPr lvl="0" marL="457200" indent="-228600">
+              <a:buFont typeface="Calibri"/>
+              <a:spcAft>
+                <a:spcPts val="1000"/>
+              </a:spcAft>
+              <a:buSzPct val="100000"/>
+              <a:buChar char="•"/>
+              <a:lnSpc>
+                <a:spcPts val="2200"/>
+              </a:lnSpc>
+            </a:pPr>
+            <a:r>
+              <a:rPr sz="2000" b="0">
+                <a:solidFill>
+                  <a:srgbClr val="333333"/>
+                </a:solidFill>
+                <a:latin typeface="Calibri"/>
+              </a:rPr>
+              <a:t>Parse the tiny graph, run the algorithm with a deterministic seed</a:t>
+            </a:r>
+          </a:p>
+          <a:p>
+            <a:pPr lvl="0" marL="457200" indent="-228600">
+              <a:buFont typeface="Calibri"/>
+              <a:spcAft>
+                <a:spcPts val="1000"/>
+              </a:spcAft>
+              <a:buSzPct val="100000"/>
+              <a:buChar char="•"/>
+              <a:lnSpc>
+                <a:spcPts val="2200"/>
+              </a:lnSpc>
+            </a:pPr>
+            <a:r>
+              <a:rPr sz="2000" b="0">
+                <a:solidFill>
+                  <a:srgbClr val="333333"/>
+                </a:solidFill>
+                <a:latin typeface="Calibri"/>
+              </a:rPr>
+              <a:t>Match the browser goldens before you claim the checklist</a:t>
+            </a:r>
+          </a:p>
+        </p:txBody>
+      </p:sp>
+      <p:sp>
+        <p:nvSpPr>
+          <p:cNvPr id="4" name="TextBox 3"/>
+          <p:cNvSpPr txBox="1"/>
+          <p:nvPr/>
+        </p:nvSpPr>
+        <p:spPr>
+          <a:xfrm>
+            <a:off x="548640" y="6355080"/>
+            <a:ext cx="11064240" cy="320040"/>
+          </a:xfrm>
+          <a:prstGeom prst="rect">
+            <a:avLst/>
+          </a:prstGeom>
+          <a:noFill/>
+        </p:spPr>
+        <p:txBody>
+          <a:bodyPr wrap="square">
+            <a:noAutofit/>
+          </a:bodyPr>
+          <a:lstStyle/>
+          <a:p>
+            <a:pPr algn="r">
+              <a:lnSpc>
+                <a:spcPts val="2200"/>
+              </a:lnSpc>
+              <a:defRPr sz="1000" b="0">
+                <a:solidFill>
+                  <a:srgbClr val="666666"/>
+                </a:solidFill>
+                <a:latin typeface="Calibri"/>
+              </a:defRPr>
+            </a:pPr>
+            <a:r>
+              <a:t>learn_partitioning — 03 fm partition</a:t>
+            </a:r>
+          </a:p>
+        </p:txBody>
+      </p:sp>
+    </p:spTree>
+  </p:cSld>
+  <p:clrMapOvr>
+    <a:masterClrMapping/>
+  </p:clrMapOvr>
+</p:sld>
+</file>
+
+<file path=ppt/slides/slide13.xml><?xml version="1.0" encoding="utf-8"?>
+<p:sld xmlns:a="http://schemas.openxmlformats.org/drawingml/2006/main" xmlns:p="http://schemas.openxmlformats.org/presentationml/2006/main" xmlns:r="http://schemas.openxmlformats.org/officeDocument/2006/relationships">
+  <p:cSld>
+    <p:spTree>
+      <p:nvGrpSpPr>
+        <p:cNvPr id="1" name=""/>
+        <p:cNvGrpSpPr/>
+        <p:nvPr/>
+      </p:nvGrpSpPr>
+      <p:grpSpPr/>
+      <p:sp>
+        <p:nvSpPr>
+          <p:cNvPr id="2" name="TextBox 1"/>
+          <p:cNvSpPr txBox="1"/>
+          <p:nvPr/>
+        </p:nvSpPr>
+        <p:spPr>
+          <a:xfrm>
+            <a:off x="548640" y="411480"/>
+            <a:ext cx="11064240" cy="777240"/>
+          </a:xfrm>
+          <a:prstGeom prst="rect">
+            <a:avLst/>
+          </a:prstGeom>
+          <a:noFill/>
+        </p:spPr>
+        <p:txBody>
+          <a:bodyPr wrap="square">
+            <a:noAutofit/>
+          </a:bodyPr>
+          <a:lstStyle/>
+          <a:p>
+            <a:pPr>
+              <a:lnSpc>
+                <a:spcPts val="2200"/>
+              </a:lnSpc>
+            </a:pPr>
+            <a:r>
+              <a:rPr sz="2800" b="1">
+                <a:solidFill>
+                  <a:srgbClr val="1A1A2E"/>
+                </a:solidFill>
+                <a:latin typeface="Calibri"/>
+              </a:rPr>
+              <a:t>Pitfalls</a:t>
+            </a:r>
+          </a:p>
+        </p:txBody>
+      </p:sp>
+      <p:sp>
+        <p:nvSpPr>
+          <p:cNvPr id="3" name="TextBox 2"/>
+          <p:cNvSpPr txBox="1"/>
+          <p:nvPr/>
+        </p:nvSpPr>
+        <p:spPr>
+          <a:xfrm>
+            <a:off x="548640" y="1234440"/>
+            <a:ext cx="11064240" cy="4937760"/>
+          </a:xfrm>
+          <a:prstGeom prst="rect">
+            <a:avLst/>
+          </a:prstGeom>
+          <a:noFill/>
+        </p:spPr>
+        <p:txBody>
+          <a:bodyPr wrap="square">
+            <a:noAutofit/>
+          </a:bodyPr>
+          <a:lstStyle/>
+          <a:p>
+            <a:pPr lvl="0" marL="457200" indent="-228600">
+              <a:buFont typeface="Calibri"/>
+              <a:spcAft>
+                <a:spcPts val="1000"/>
+              </a:spcAft>
+              <a:buSzPct val="100000"/>
+              <a:buChar char="•"/>
+              <a:lnSpc>
+                <a:spcPts val="2200"/>
+              </a:lnSpc>
+            </a:pPr>
+            <a:r>
+              <a:rPr sz="2000" b="0">
+                <a:solidFill>
+                  <a:srgbClr val="333333"/>
+                </a:solidFill>
+                <a:latin typeface="Calibri"/>
+              </a:rPr>
+              <a:t>Common traps</a:t>
+            </a:r>
+          </a:p>
+          <a:p>
+            <a:pPr lvl="0" marL="457200" indent="-228600">
+              <a:buFont typeface="Calibri"/>
+              <a:spcAft>
+                <a:spcPts val="1000"/>
+              </a:spcAft>
+              <a:buSzPct val="100000"/>
+              <a:buChar char="•"/>
+              <a:lnSpc>
+                <a:spcPts val="2200"/>
+              </a:lnSpc>
+            </a:pPr>
+            <a:r>
+              <a:rPr sz="2000" b="0">
+                <a:solidFill>
+                  <a:srgbClr val="333333"/>
+                </a:solidFill>
+                <a:latin typeface="Calibri"/>
+              </a:rPr>
+              <a:t>For multilevel flows, verify coarsening before you blame the refiner</a:t>
+            </a:r>
+          </a:p>
+        </p:txBody>
+      </p:sp>
+      <p:sp>
+        <p:nvSpPr>
+          <p:cNvPr id="4" name="TextBox 3"/>
+          <p:cNvSpPr txBox="1"/>
+          <p:nvPr/>
+        </p:nvSpPr>
+        <p:spPr>
+          <a:xfrm>
+            <a:off x="548640" y="6355080"/>
+            <a:ext cx="11064240" cy="320040"/>
+          </a:xfrm>
+          <a:prstGeom prst="rect">
+            <a:avLst/>
+          </a:prstGeom>
+          <a:noFill/>
+        </p:spPr>
+        <p:txBody>
+          <a:bodyPr wrap="square">
+            <a:noAutofit/>
+          </a:bodyPr>
+          <a:lstStyle/>
+          <a:p>
+            <a:pPr algn="r">
+              <a:lnSpc>
+                <a:spcPts val="2200"/>
+              </a:lnSpc>
+              <a:defRPr sz="1000" b="0">
+                <a:solidFill>
+                  <a:srgbClr val="666666"/>
+                </a:solidFill>
+                <a:latin typeface="Calibri"/>
+              </a:defRPr>
+            </a:pPr>
+            <a:r>
+              <a:t>learn_partitioning — 03 fm partition</a:t>
+            </a:r>
+          </a:p>
+        </p:txBody>
+      </p:sp>
+    </p:spTree>
+  </p:cSld>
+  <p:clrMapOvr>
+    <a:masterClrMapping/>
+  </p:clrMapOvr>
+</p:sld>
+</file>
+
+<file path=ppt/slides/slide14.xml><?xml version="1.0" encoding="utf-8"?>
+<p:sld xmlns:a="http://schemas.openxmlformats.org/drawingml/2006/main" xmlns:p="http://schemas.openxmlformats.org/presentationml/2006/main" xmlns:r="http://schemas.openxmlformats.org/officeDocument/2006/relationships">
+  <p:cSld>
+    <p:spTree>
+      <p:nvGrpSpPr>
+        <p:cNvPr id="1" name=""/>
+        <p:cNvGrpSpPr/>
+        <p:nvPr/>
+      </p:nvGrpSpPr>
+      <p:grpSpPr/>
+      <p:sp>
+        <p:nvSpPr>
+          <p:cNvPr id="2" name="TextBox 1"/>
+          <p:cNvSpPr txBox="1"/>
+          <p:nvPr/>
+        </p:nvSpPr>
+        <p:spPr>
+          <a:xfrm>
+            <a:off x="548640" y="411480"/>
+            <a:ext cx="11064240" cy="777240"/>
+          </a:xfrm>
+          <a:prstGeom prst="rect">
+            <a:avLst/>
+          </a:prstGeom>
+          <a:noFill/>
+        </p:spPr>
+        <p:txBody>
+          <a:bodyPr wrap="square">
+            <a:noAutofit/>
+          </a:bodyPr>
+          <a:lstStyle/>
+          <a:p>
+            <a:pPr>
+              <a:lnSpc>
+                <a:spcPts val="2200"/>
+              </a:lnSpc>
+            </a:pPr>
+            <a:r>
+              <a:rPr sz="2800" b="1">
+                <a:solidFill>
+                  <a:srgbClr val="1A1A2E"/>
+                </a:solidFill>
+                <a:latin typeface="Calibri"/>
+              </a:rPr>
               <a:t>Your turn</a:t>
             </a:r>
           </a:p>
@@ -4800,6 +5484,125 @@
               <a:t>Two legal flips can equal one KL swap’s total gain on this instance</a:t>
             </a:r>
           </a:p>
+        </p:txBody>
+      </p:sp>
+      <p:sp>
+        <p:nvSpPr>
+          <p:cNvPr id="4" name="TextBox 3"/>
+          <p:cNvSpPr txBox="1"/>
+          <p:nvPr/>
+        </p:nvSpPr>
+        <p:spPr>
+          <a:xfrm>
+            <a:off x="548640" y="6355080"/>
+            <a:ext cx="11064240" cy="320040"/>
+          </a:xfrm>
+          <a:prstGeom prst="rect">
+            <a:avLst/>
+          </a:prstGeom>
+          <a:noFill/>
+        </p:spPr>
+        <p:txBody>
+          <a:bodyPr wrap="square">
+            <a:noAutofit/>
+          </a:bodyPr>
+          <a:lstStyle/>
+          <a:p>
+            <a:pPr algn="r">
+              <a:lnSpc>
+                <a:spcPts val="2200"/>
+              </a:lnSpc>
+              <a:defRPr sz="1000" b="0">
+                <a:solidFill>
+                  <a:srgbClr val="666666"/>
+                </a:solidFill>
+                <a:latin typeface="Calibri"/>
+              </a:defRPr>
+            </a:pPr>
+            <a:r>
+              <a:t>learn_partitioning — 03 fm partition</a:t>
+            </a:r>
+          </a:p>
+        </p:txBody>
+      </p:sp>
+    </p:spTree>
+  </p:cSld>
+  <p:clrMapOvr>
+    <a:masterClrMapping/>
+  </p:clrMapOvr>
+</p:sld>
+</file>
+
+<file path=ppt/slides/slide3.xml><?xml version="1.0" encoding="utf-8"?>
+<p:sld xmlns:a="http://schemas.openxmlformats.org/drawingml/2006/main" xmlns:p="http://schemas.openxmlformats.org/presentationml/2006/main" xmlns:r="http://schemas.openxmlformats.org/officeDocument/2006/relationships">
+  <p:cSld>
+    <p:spTree>
+      <p:nvGrpSpPr>
+        <p:cNvPr id="1" name=""/>
+        <p:cNvGrpSpPr/>
+        <p:nvPr/>
+      </p:nvGrpSpPr>
+      <p:grpSpPr/>
+      <p:sp>
+        <p:nvSpPr>
+          <p:cNvPr id="2" name="TextBox 1"/>
+          <p:cNvSpPr txBox="1"/>
+          <p:nvPr/>
+        </p:nvSpPr>
+        <p:spPr>
+          <a:xfrm>
+            <a:off x="548640" y="411480"/>
+            <a:ext cx="11064240" cy="777240"/>
+          </a:xfrm>
+          <a:prstGeom prst="rect">
+            <a:avLst/>
+          </a:prstGeom>
+          <a:noFill/>
+        </p:spPr>
+        <p:txBody>
+          <a:bodyPr wrap="square">
+            <a:noAutofit/>
+          </a:bodyPr>
+          <a:lstStyle/>
+          <a:p>
+            <a:pPr>
+              <a:lnSpc>
+                <a:spcPts val="2200"/>
+              </a:lnSpc>
+            </a:pPr>
+            <a:r>
+              <a:rPr sz="2800" b="1">
+                <a:solidFill>
+                  <a:srgbClr val="1A1A2E"/>
+                </a:solidFill>
+                <a:latin typeface="Calibri"/>
+              </a:rPr>
+              <a:t>Pseudocode</a:t>
+            </a:r>
+          </a:p>
+        </p:txBody>
+      </p:sp>
+      <p:sp>
+        <p:nvSpPr>
+          <p:cNvPr id="3" name="TextBox 2"/>
+          <p:cNvSpPr txBox="1"/>
+          <p:nvPr/>
+        </p:nvSpPr>
+        <p:spPr>
+          <a:xfrm>
+            <a:off x="548640" y="1234440"/>
+            <a:ext cx="11064240" cy="4937760"/>
+          </a:xfrm>
+          <a:prstGeom prst="rect">
+            <a:avLst/>
+          </a:prstGeom>
+          <a:noFill/>
+        </p:spPr>
+        <p:txBody>
+          <a:bodyPr wrap="square">
+            <a:noAutofit/>
+          </a:bodyPr>
+          <a:lstStyle/>
           <a:p>
             <a:pPr lvl="0" marL="457200" indent="-228600">
               <a:buFont typeface="Calibri"/>
@@ -4819,7 +5622,73 @@
                 </a:solidFill>
                 <a:latin typeface="Calibri"/>
               </a:rPr>
-              <a:t>&lt;!-- algorithm-walkthrough --&gt;</a:t>
+              <a:t>FM moves one vertex at a time</a:t>
+            </a:r>
+          </a:p>
+          <a:p>
+            <a:pPr lvl="0" marL="457200" indent="-228600">
+              <a:buFont typeface="Calibri"/>
+              <a:spcAft>
+                <a:spcPts val="1000"/>
+              </a:spcAft>
+              <a:buSzPct val="100000"/>
+              <a:buChar char="•"/>
+              <a:lnSpc>
+                <a:spcPts val="2200"/>
+              </a:lnSpc>
+            </a:pPr>
+            <a:r>
+              <a:rPr sz="2000" b="0">
+                <a:solidFill>
+                  <a:srgbClr val="333333"/>
+                </a:solidFill>
+                <a:latin typeface="Calibri"/>
+              </a:rPr>
+              <a:t>Pseudocode ranks unlocked legal flips by gain</a:t>
+            </a:r>
+          </a:p>
+          <a:p>
+            <a:pPr lvl="0" marL="457200" indent="-228600">
+              <a:buFont typeface="Calibri"/>
+              <a:spcAft>
+                <a:spcPts val="1000"/>
+              </a:spcAft>
+              <a:buSzPct val="100000"/>
+              <a:buChar char="•"/>
+              <a:lnSpc>
+                <a:spcPts val="2200"/>
+              </a:lnSpc>
+            </a:pPr>
+            <a:r>
+              <a:rPr sz="2000" b="0">
+                <a:solidFill>
+                  <a:srgbClr val="333333"/>
+                </a:solidFill>
+                <a:latin typeface="Calibri"/>
+              </a:rPr>
+              <a:t>Open this module's examples file and find the Pseudocode section</a:t>
+            </a:r>
+          </a:p>
+          <a:p>
+            <a:pPr lvl="0" marL="457200" indent="-228600">
+              <a:buFont typeface="Calibri"/>
+              <a:spcAft>
+                <a:spcPts val="1000"/>
+              </a:spcAft>
+              <a:buSzPct val="100000"/>
+              <a:buChar char="•"/>
+              <a:lnSpc>
+                <a:spcPts val="2200"/>
+              </a:lnSpc>
+            </a:pPr>
+            <a:r>
+              <a:rPr sz="2000" b="0">
+                <a:solidFill>
+                  <a:srgbClr val="333333"/>
+                </a:solidFill>
+                <a:latin typeface="Calibri"/>
+              </a:rPr>
+              <a:t>That written sketch is what you implement on the implement track and what the browser</a:t>
             </a:r>
           </a:p>
         </p:txBody>
@@ -4871,7 +5740,421 @@
 </p:sld>
 </file>
 
-<file path=ppt/slides/slide3.xml><?xml version="1.0" encoding="utf-8"?>
+<file path=ppt/slides/slide4.xml><?xml version="1.0" encoding="utf-8"?>
+<p:sld xmlns:a="http://schemas.openxmlformats.org/drawingml/2006/main" xmlns:p="http://schemas.openxmlformats.org/presentationml/2006/main" xmlns:r="http://schemas.openxmlformats.org/officeDocument/2006/relationships">
+  <p:cSld>
+    <p:spTree>
+      <p:nvGrpSpPr>
+        <p:cNvPr id="1" name=""/>
+        <p:cNvGrpSpPr/>
+        <p:nvPr/>
+      </p:nvGrpSpPr>
+      <p:grpSpPr/>
+      <p:sp>
+        <p:nvSpPr>
+          <p:cNvPr id="2" name="TextBox 1"/>
+          <p:cNvSpPr txBox="1"/>
+          <p:nvPr/>
+        </p:nvSpPr>
+        <p:spPr>
+          <a:xfrm>
+            <a:off x="548640" y="411480"/>
+            <a:ext cx="11064240" cy="777240"/>
+          </a:xfrm>
+          <a:prstGeom prst="rect">
+            <a:avLst/>
+          </a:prstGeom>
+          <a:noFill/>
+        </p:spPr>
+        <p:txBody>
+          <a:bodyPr wrap="square">
+            <a:noAutofit/>
+          </a:bodyPr>
+          <a:lstStyle/>
+          <a:p>
+            <a:pPr>
+              <a:lnSpc>
+                <a:spcPts val="2200"/>
+              </a:lnSpc>
+            </a:pPr>
+            <a:r>
+              <a:rPr sz="2800" b="1">
+                <a:solidFill>
+                  <a:srgbClr val="1A1A2E"/>
+                </a:solidFill>
+                <a:latin typeface="Calibri"/>
+              </a:rPr>
+              <a:t>Algorithm sketch</a:t>
+            </a:r>
+          </a:p>
+        </p:txBody>
+      </p:sp>
+      <p:sp>
+        <p:nvSpPr>
+          <p:cNvPr id="3" name="TextBox 2"/>
+          <p:cNvSpPr txBox="1"/>
+          <p:nvPr/>
+        </p:nvSpPr>
+        <p:spPr>
+          <a:xfrm>
+            <a:off x="548640" y="1234440"/>
+            <a:ext cx="11064240" cy="4937760"/>
+          </a:xfrm>
+          <a:prstGeom prst="rect">
+            <a:avLst/>
+          </a:prstGeom>
+          <a:noFill/>
+        </p:spPr>
+        <p:txBody>
+          <a:bodyPr wrap="square">
+            <a:noAutofit/>
+          </a:bodyPr>
+          <a:lstStyle/>
+          <a:p>
+            <a:pPr lvl="0" marL="457200" indent="-228600">
+              <a:buFont typeface="Calibri"/>
+              <a:spcAft>
+                <a:spcPts val="1000"/>
+              </a:spcAft>
+              <a:buSzPct val="100000"/>
+              <a:buChar char="•"/>
+              <a:lnSpc>
+                <a:spcPts val="2200"/>
+              </a:lnSpc>
+            </a:pPr>
+            <a:r>
+              <a:rPr sz="2000" b="0">
+                <a:solidFill>
+                  <a:srgbClr val="333333"/>
+                </a:solidFill>
+                <a:latin typeface="Calibri"/>
+              </a:rPr>
+              <a:t>Same bad seed as KL</a:t>
+            </a:r>
+          </a:p>
+        </p:txBody>
+      </p:sp>
+      <p:sp>
+        <p:nvSpPr>
+          <p:cNvPr id="4" name="TextBox 3"/>
+          <p:cNvSpPr txBox="1"/>
+          <p:nvPr/>
+        </p:nvSpPr>
+        <p:spPr>
+          <a:xfrm>
+            <a:off x="548640" y="6355080"/>
+            <a:ext cx="11064240" cy="320040"/>
+          </a:xfrm>
+          <a:prstGeom prst="rect">
+            <a:avLst/>
+          </a:prstGeom>
+          <a:noFill/>
+        </p:spPr>
+        <p:txBody>
+          <a:bodyPr wrap="square">
+            <a:noAutofit/>
+          </a:bodyPr>
+          <a:lstStyle/>
+          <a:p>
+            <a:pPr algn="r">
+              <a:lnSpc>
+                <a:spcPts val="2200"/>
+              </a:lnSpc>
+              <a:defRPr sz="1000" b="0">
+                <a:solidFill>
+                  <a:srgbClr val="666666"/>
+                </a:solidFill>
+                <a:latin typeface="Calibri"/>
+              </a:defRPr>
+            </a:pPr>
+            <a:r>
+              <a:t>learn_partitioning — 03 fm partition</a:t>
+            </a:r>
+          </a:p>
+        </p:txBody>
+      </p:sp>
+    </p:spTree>
+  </p:cSld>
+  <p:clrMapOvr>
+    <a:masterClrMapping/>
+  </p:clrMapOvr>
+</p:sld>
+</file>
+
+<file path=ppt/slides/slide5.xml><?xml version="1.0" encoding="utf-8"?>
+<p:sld xmlns:a="http://schemas.openxmlformats.org/drawingml/2006/main" xmlns:p="http://schemas.openxmlformats.org/presentationml/2006/main" xmlns:r="http://schemas.openxmlformats.org/officeDocument/2006/relationships">
+  <p:cSld>
+    <p:spTree>
+      <p:nvGrpSpPr>
+        <p:cNvPr id="1" name=""/>
+        <p:cNvGrpSpPr/>
+        <p:nvPr/>
+      </p:nvGrpSpPr>
+      <p:grpSpPr/>
+      <p:sp>
+        <p:nvSpPr>
+          <p:cNvPr id="2" name="TextBox 1"/>
+          <p:cNvSpPr txBox="1"/>
+          <p:nvPr/>
+        </p:nvSpPr>
+        <p:spPr>
+          <a:xfrm>
+            <a:off x="548640" y="411480"/>
+            <a:ext cx="11064240" cy="777240"/>
+          </a:xfrm>
+          <a:prstGeom prst="rect">
+            <a:avLst/>
+          </a:prstGeom>
+          <a:noFill/>
+        </p:spPr>
+        <p:txBody>
+          <a:bodyPr wrap="square">
+            <a:noAutofit/>
+          </a:bodyPr>
+          <a:lstStyle/>
+          <a:p>
+            <a:pPr>
+              <a:lnSpc>
+                <a:spcPts val="2200"/>
+              </a:lnSpc>
+            </a:pPr>
+            <a:r>
+              <a:rPr sz="2800" b="1">
+                <a:solidFill>
+                  <a:srgbClr val="1A1A2E"/>
+                </a:solidFill>
+                <a:latin typeface="Calibri"/>
+              </a:rPr>
+              <a:t>Algorithm sketch — try these</a:t>
+            </a:r>
+          </a:p>
+        </p:txBody>
+      </p:sp>
+      <p:sp>
+        <p:nvSpPr>
+          <p:cNvPr id="3" name="TextBox 2"/>
+          <p:cNvSpPr txBox="1"/>
+          <p:nvPr/>
+        </p:nvSpPr>
+        <p:spPr>
+          <a:xfrm>
+            <a:off x="548640" y="1143000"/>
+            <a:ext cx="11064240" cy="5029200"/>
+          </a:xfrm>
+          <a:prstGeom prst="rect">
+            <a:avLst/>
+          </a:prstGeom>
+          <a:solidFill>
+            <a:srgbClr val="F4F4F4"/>
+          </a:solidFill>
+        </p:spPr>
+        <p:txBody>
+          <a:bodyPr wrap="square">
+            <a:noAutofit/>
+          </a:bodyPr>
+          <a:lstStyle/>
+          <a:p>
+            <a:pPr>
+              <a:lnSpc>
+                <a:spcPts val="2200"/>
+              </a:lnSpc>
+              <a:spcAft>
+                <a:spcPts val="400"/>
+              </a:spcAft>
+            </a:pPr>
+            <a:r>
+              <a:rPr sz="2000" b="0">
+                <a:solidFill>
+                  <a:srgbClr val="333333"/>
+                </a:solidFill>
+                <a:latin typeface="Consolas"/>
+              </a:rPr>
+              <a:t>INPUT: side[], balance_tol, max_passes</a:t>
+            </a:r>
+          </a:p>
+          <a:p>
+            <a:pPr>
+              <a:lnSpc>
+                <a:spcPts val="2200"/>
+              </a:lnSpc>
+              <a:spcAft>
+                <a:spcPts val="400"/>
+              </a:spcAft>
+            </a:pPr>
+            <a:r>
+              <a:rPr sz="2000" b="0">
+                <a:solidFill>
+                  <a:srgbClr val="333333"/>
+                </a:solidFill>
+                <a:latin typeface="Consolas"/>
+              </a:rPr>
+              <a:t>OUTPUT: refined side[]</a:t>
+            </a:r>
+          </a:p>
+          <a:p>
+            <a:pPr>
+              <a:lnSpc>
+                <a:spcPts val="2200"/>
+              </a:lnSpc>
+              <a:spcAft>
+                <a:spcPts val="400"/>
+              </a:spcAft>
+            </a:pPr>
+            <a:r>
+              <a:rPr sz="2000" b="0">
+                <a:solidFill>
+                  <a:srgbClr val="333333"/>
+                </a:solidFill>
+                <a:latin typeface="Consolas"/>
+              </a:rPr>
+              <a:t>each pass: while unlocked legal moves exist:</a:t>
+            </a:r>
+          </a:p>
+          <a:p>
+            <a:pPr>
+              <a:lnSpc>
+                <a:spcPts val="2200"/>
+              </a:lnSpc>
+              <a:spcAft>
+                <a:spcPts val="400"/>
+              </a:spcAft>
+            </a:pPr>
+            <a:r>
+              <a:rPr sz="2000" b="0">
+                <a:solidFill>
+                  <a:srgbClr val="333333"/>
+                </a:solidFill>
+                <a:latin typeface="Consolas"/>
+              </a:rPr>
+              <a:t>  pick v with max gain among balance-ok flips</a:t>
+            </a:r>
+          </a:p>
+          <a:p>
+            <a:pPr>
+              <a:lnSpc>
+                <a:spcPts val="2200"/>
+              </a:lnSpc>
+              <a:spcAft>
+                <a:spcPts val="400"/>
+              </a:spcAft>
+            </a:pPr>
+            <a:r>
+              <a:rPr sz="2000" b="0">
+                <a:solidFill>
+                  <a:srgbClr val="333333"/>
+                </a:solidFill>
+                <a:latin typeface="Consolas"/>
+              </a:rPr>
+              <a:t>  lock v; flip on working copy</a:t>
+            </a:r>
+          </a:p>
+          <a:p>
+            <a:pPr>
+              <a:lnSpc>
+                <a:spcPts val="2200"/>
+              </a:lnSpc>
+              <a:spcAft>
+                <a:spcPts val="400"/>
+              </a:spcAft>
+            </a:pPr>
+            <a:r>
+              <a:rPr sz="2000" b="0">
+                <a:solidFill>
+                  <a:srgbClr val="333333"/>
+                </a:solidFill>
+                <a:latin typeface="Consolas"/>
+              </a:rPr>
+              <a:t>keep best positive-gain prefix; apply</a:t>
+            </a:r>
+          </a:p>
+          <a:p>
+            <a:pPr>
+              <a:lnSpc>
+                <a:spcPts val="2200"/>
+              </a:lnSpc>
+              <a:spcAft>
+                <a:spcPts val="400"/>
+              </a:spcAft>
+            </a:pPr>
+            <a:r>
+              <a:rPr sz="2000" b="0">
+                <a:solidFill>
+                  <a:srgbClr val="333333"/>
+                </a:solidFill>
+                <a:latin typeface="Consolas"/>
+              </a:rPr>
+              <a:t>stop when a pass cannot improve</a:t>
+            </a:r>
+          </a:p>
+          <a:p>
+            <a:pPr>
+              <a:lnSpc>
+                <a:spcPts val="2200"/>
+              </a:lnSpc>
+              <a:spcAft>
+                <a:spcPts val="400"/>
+              </a:spcAft>
+            </a:pPr>
+            <a:r>
+              <a:rPr sz="2000" b="0">
+                <a:solidFill>
+                  <a:srgbClr val="333333"/>
+                </a:solidFill>
+                <a:latin typeface="Consolas"/>
+              </a:rPr>
+              <a:t>GOLDEN BAD_SEED → flip D then A → cut 3</a:t>
+            </a:r>
+          </a:p>
+        </p:txBody>
+      </p:sp>
+      <p:sp>
+        <p:nvSpPr>
+          <p:cNvPr id="4" name="TextBox 3"/>
+          <p:cNvSpPr txBox="1"/>
+          <p:nvPr/>
+        </p:nvSpPr>
+        <p:spPr>
+          <a:xfrm>
+            <a:off x="548640" y="6355080"/>
+            <a:ext cx="11064240" cy="320040"/>
+          </a:xfrm>
+          <a:prstGeom prst="rect">
+            <a:avLst/>
+          </a:prstGeom>
+          <a:noFill/>
+        </p:spPr>
+        <p:txBody>
+          <a:bodyPr wrap="square">
+            <a:noAutofit/>
+          </a:bodyPr>
+          <a:lstStyle/>
+          <a:p>
+            <a:pPr algn="r">
+              <a:lnSpc>
+                <a:spcPts val="2200"/>
+              </a:lnSpc>
+              <a:defRPr sz="1000" b="0">
+                <a:solidFill>
+                  <a:srgbClr val="666666"/>
+                </a:solidFill>
+                <a:latin typeface="Calibri"/>
+              </a:defRPr>
+            </a:pPr>
+            <a:r>
+              <a:t>learn_partitioning — 03 fm partition</a:t>
+            </a:r>
+          </a:p>
+        </p:txBody>
+      </p:sp>
+    </p:spTree>
+  </p:cSld>
+  <p:clrMapOvr>
+    <a:masterClrMapping/>
+  </p:clrMapOvr>
+</p:sld>
+</file>
+
+<file path=ppt/slides/slide6.xml><?xml version="1.0" encoding="utf-8"?>
 <p:sld xmlns:a="http://schemas.openxmlformats.org/drawingml/2006/main" xmlns:p="http://schemas.openxmlformats.org/presentationml/2006/main" xmlns:r="http://schemas.openxmlformats.org/officeDocument/2006/relationships">
   <p:cSld>
     <p:spTree>
@@ -5030,7 +6313,7 @@
 </p:sld>
 </file>
 
-<file path=ppt/slides/slide4.xml><?xml version="1.0" encoding="utf-8"?>
+<file path=ppt/slides/slide7.xml><?xml version="1.0" encoding="utf-8"?>
 <p:sld xmlns:a="http://schemas.openxmlformats.org/drawingml/2006/main" xmlns:p="http://schemas.openxmlformats.org/presentationml/2006/main" xmlns:r="http://schemas.openxmlformats.org/officeDocument/2006/relationships">
   <p:cSld>
     <p:spTree>
@@ -5189,7 +6472,7 @@
 </p:sld>
 </file>
 
-<file path=ppt/slides/slide5.xml><?xml version="1.0" encoding="utf-8"?>
+<file path=ppt/slides/slide8.xml><?xml version="1.0" encoding="utf-8"?>
 <p:sld xmlns:a="http://schemas.openxmlformats.org/drawingml/2006/main" xmlns:p="http://schemas.openxmlformats.org/presentationml/2006/main" xmlns:r="http://schemas.openxmlformats.org/officeDocument/2006/relationships">
   <p:cSld>
     <p:spTree>
@@ -5348,7 +6631,7 @@
 </p:sld>
 </file>
 
-<file path=ppt/slides/slide6.xml><?xml version="1.0" encoding="utf-8"?>
+<file path=ppt/slides/slide9.xml><?xml version="1.0" encoding="utf-8"?>
 <p:sld xmlns:a="http://schemas.openxmlformats.org/drawingml/2006/main" xmlns:p="http://schemas.openxmlformats.org/presentationml/2006/main" xmlns:r="http://schemas.openxmlformats.org/officeDocument/2006/relationships">
   <p:cSld>
     <p:spTree>
@@ -5463,553 +6746,6 @@
       <p:sp>
         <p:nvSpPr>
           <p:cNvPr id="5" name="TextBox 4"/>
-          <p:cNvSpPr txBox="1"/>
-          <p:nvPr/>
-        </p:nvSpPr>
-        <p:spPr>
-          <a:xfrm>
-            <a:off x="548640" y="6355080"/>
-            <a:ext cx="11064240" cy="320040"/>
-          </a:xfrm>
-          <a:prstGeom prst="rect">
-            <a:avLst/>
-          </a:prstGeom>
-          <a:noFill/>
-        </p:spPr>
-        <p:txBody>
-          <a:bodyPr wrap="square">
-            <a:noAutofit/>
-          </a:bodyPr>
-          <a:lstStyle/>
-          <a:p>
-            <a:pPr algn="r">
-              <a:lnSpc>
-                <a:spcPts val="2200"/>
-              </a:lnSpc>
-              <a:defRPr sz="1000" b="0">
-                <a:solidFill>
-                  <a:srgbClr val="666666"/>
-                </a:solidFill>
-                <a:latin typeface="Calibri"/>
-              </a:defRPr>
-            </a:pPr>
-            <a:r>
-              <a:t>learn_partitioning — 03 fm partition</a:t>
-            </a:r>
-          </a:p>
-        </p:txBody>
-      </p:sp>
-    </p:spTree>
-  </p:cSld>
-  <p:clrMapOvr>
-    <a:masterClrMapping/>
-  </p:clrMapOvr>
-</p:sld>
-</file>
-
-<file path=ppt/slides/slide7.xml><?xml version="1.0" encoding="utf-8"?>
-<p:sld xmlns:a="http://schemas.openxmlformats.org/drawingml/2006/main" xmlns:p="http://schemas.openxmlformats.org/presentationml/2006/main" xmlns:r="http://schemas.openxmlformats.org/officeDocument/2006/relationships">
-  <p:cSld>
-    <p:spTree>
-      <p:nvGrpSpPr>
-        <p:cNvPr id="1" name=""/>
-        <p:cNvGrpSpPr/>
-        <p:nvPr/>
-      </p:nvGrpSpPr>
-      <p:grpSpPr/>
-      <p:sp>
-        <p:nvSpPr>
-          <p:cNvPr id="2" name="TextBox 1"/>
-          <p:cNvSpPr txBox="1"/>
-          <p:nvPr/>
-        </p:nvSpPr>
-        <p:spPr>
-          <a:xfrm>
-            <a:off x="548640" y="411480"/>
-            <a:ext cx="11064240" cy="777240"/>
-          </a:xfrm>
-          <a:prstGeom prst="rect">
-            <a:avLst/>
-          </a:prstGeom>
-          <a:noFill/>
-        </p:spPr>
-        <p:txBody>
-          <a:bodyPr wrap="square">
-            <a:noAutofit/>
-          </a:bodyPr>
-          <a:lstStyle/>
-          <a:p>
-            <a:pPr>
-              <a:lnSpc>
-                <a:spcPts val="2200"/>
-              </a:lnSpc>
-            </a:pPr>
-            <a:r>
-              <a:rPr sz="2800" b="1">
-                <a:solidFill>
-                  <a:srgbClr val="1A1A2E"/>
-                </a:solidFill>
-                <a:latin typeface="Calibri"/>
-              </a:rPr>
-              <a:t>Pass 1 confirms local optimum</a:t>
-            </a:r>
-          </a:p>
-        </p:txBody>
-      </p:sp>
-      <p:pic>
-        <p:nvPicPr>
-          <p:cNvPr id="3" name="Picture 2" descr="05-pass1-stop.png"/>
-          <p:cNvPicPr>
-            <a:picLocks noChangeAspect="1"/>
-          </p:cNvPicPr>
-          <p:nvPr/>
-        </p:nvPicPr>
-        <p:blipFill>
-          <a:blip r:embed="rId2"/>
-          <a:stretch>
-            <a:fillRect/>
-          </a:stretch>
-        </p:blipFill>
-        <p:spPr>
-          <a:xfrm>
-            <a:off x="548640" y="1143000"/>
-            <a:ext cx="9404113" cy="4572000"/>
-          </a:xfrm>
-          <a:prstGeom prst="rect">
-            <a:avLst/>
-          </a:prstGeom>
-        </p:spPr>
-      </p:pic>
-      <p:sp>
-        <p:nvSpPr>
-          <p:cNvPr id="4" name="TextBox 3"/>
-          <p:cNvSpPr txBox="1"/>
-          <p:nvPr/>
-        </p:nvSpPr>
-        <p:spPr>
-          <a:xfrm>
-            <a:off x="548640" y="5897880"/>
-            <a:ext cx="11064240" cy="411480"/>
-          </a:xfrm>
-          <a:prstGeom prst="rect">
-            <a:avLst/>
-          </a:prstGeom>
-          <a:noFill/>
-        </p:spPr>
-        <p:txBody>
-          <a:bodyPr wrap="square">
-            <a:noAutofit/>
-          </a:bodyPr>
-          <a:lstStyle/>
-          <a:p>
-            <a:pPr>
-              <a:lnSpc>
-                <a:spcPts val="2200"/>
-              </a:lnSpc>
-            </a:pPr>
-            <a:r>
-              <a:rPr sz="1200" b="0">
-                <a:solidFill>
-                  <a:srgbClr val="333333"/>
-                </a:solidFill>
-                <a:latin typeface="Calibri"/>
-              </a:rPr>
-              <a:t>Pass 1 confirms local optimum</a:t>
-            </a:r>
-          </a:p>
-        </p:txBody>
-      </p:sp>
-      <p:sp>
-        <p:nvSpPr>
-          <p:cNvPr id="5" name="TextBox 4"/>
-          <p:cNvSpPr txBox="1"/>
-          <p:nvPr/>
-        </p:nvSpPr>
-        <p:spPr>
-          <a:xfrm>
-            <a:off x="548640" y="6355080"/>
-            <a:ext cx="11064240" cy="320040"/>
-          </a:xfrm>
-          <a:prstGeom prst="rect">
-            <a:avLst/>
-          </a:prstGeom>
-          <a:noFill/>
-        </p:spPr>
-        <p:txBody>
-          <a:bodyPr wrap="square">
-            <a:noAutofit/>
-          </a:bodyPr>
-          <a:lstStyle/>
-          <a:p>
-            <a:pPr algn="r">
-              <a:lnSpc>
-                <a:spcPts val="2200"/>
-              </a:lnSpc>
-              <a:defRPr sz="1000" b="0">
-                <a:solidFill>
-                  <a:srgbClr val="666666"/>
-                </a:solidFill>
-                <a:latin typeface="Calibri"/>
-              </a:defRPr>
-            </a:pPr>
-            <a:r>
-              <a:t>learn_partitioning — 03 fm partition</a:t>
-            </a:r>
-          </a:p>
-        </p:txBody>
-      </p:sp>
-    </p:spTree>
-  </p:cSld>
-  <p:clrMapOvr>
-    <a:masterClrMapping/>
-  </p:clrMapOvr>
-</p:sld>
-</file>
-
-<file path=ppt/slides/slide8.xml><?xml version="1.0" encoding="utf-8"?>
-<p:sld xmlns:a="http://schemas.openxmlformats.org/drawingml/2006/main" xmlns:p="http://schemas.openxmlformats.org/presentationml/2006/main" xmlns:r="http://schemas.openxmlformats.org/officeDocument/2006/relationships">
-  <p:cSld>
-    <p:spTree>
-      <p:nvGrpSpPr>
-        <p:cNvPr id="1" name=""/>
-        <p:cNvGrpSpPr/>
-        <p:nvPr/>
-      </p:nvGrpSpPr>
-      <p:grpSpPr/>
-      <p:sp>
-        <p:nvSpPr>
-          <p:cNvPr id="2" name="TextBox 1"/>
-          <p:cNvSpPr txBox="1"/>
-          <p:nvPr/>
-        </p:nvSpPr>
-        <p:spPr>
-          <a:xfrm>
-            <a:off x="548640" y="411480"/>
-            <a:ext cx="11064240" cy="777240"/>
-          </a:xfrm>
-          <a:prstGeom prst="rect">
-            <a:avLst/>
-          </a:prstGeom>
-          <a:noFill/>
-        </p:spPr>
-        <p:txBody>
-          <a:bodyPr wrap="square">
-            <a:noAutofit/>
-          </a:bodyPr>
-          <a:lstStyle/>
-          <a:p>
-            <a:pPr>
-              <a:lnSpc>
-                <a:spcPts val="2200"/>
-              </a:lnSpc>
-            </a:pPr>
-            <a:r>
-              <a:rPr sz="2800" b="1">
-                <a:solidFill>
-                  <a:srgbClr val="1A1A2E"/>
-                </a:solidFill>
-                <a:latin typeface="Calibri"/>
-              </a:rPr>
-              <a:t>Browser lab track</a:t>
-            </a:r>
-          </a:p>
-        </p:txBody>
-      </p:sp>
-      <p:sp>
-        <p:nvSpPr>
-          <p:cNvPr id="3" name="TextBox 2"/>
-          <p:cNvSpPr txBox="1"/>
-          <p:nvPr/>
-        </p:nvSpPr>
-        <p:spPr>
-          <a:xfrm>
-            <a:off x="548640" y="1234440"/>
-            <a:ext cx="11064240" cy="4937760"/>
-          </a:xfrm>
-          <a:prstGeom prst="rect">
-            <a:avLst/>
-          </a:prstGeom>
-          <a:noFill/>
-        </p:spPr>
-        <p:txBody>
-          <a:bodyPr wrap="square">
-            <a:noAutofit/>
-          </a:bodyPr>
-          <a:lstStyle/>
-          <a:p>
-            <a:pPr lvl="0" marL="457200" indent="-228600">
-              <a:buFont typeface="Calibri"/>
-              <a:spcAft>
-                <a:spcPts val="1000"/>
-              </a:spcAft>
-              <a:buSzPct val="100000"/>
-              <a:buChar char="•"/>
-              <a:lnSpc>
-                <a:spcPts val="2200"/>
-              </a:lnSpc>
-            </a:pPr>
-            <a:r>
-              <a:rPr sz="2000" b="0">
-                <a:solidFill>
-                  <a:srgbClr val="333333"/>
-                </a:solidFill>
-                <a:latin typeface="Calibri"/>
-              </a:rPr>
-              <a:t>In the browser lab track, open the </a:t>
-            </a:r>
-            <a:r>
-              <a:rPr sz="2000" b="1">
-                <a:solidFill>
-                  <a:srgbClr val="333333"/>
-                </a:solidFill>
-                <a:latin typeface="Calibri"/>
-              </a:rPr>
-              <a:t>fm-partition</a:t>
-            </a:r>
-            <a:r>
-              <a:rPr sz="2000" b="0">
-                <a:solidFill>
-                  <a:srgbClr val="333333"/>
-                </a:solidFill>
-                <a:latin typeface="Calibri"/>
-              </a:rPr>
-              <a:t> lab from the tools shelf</a:t>
-            </a:r>
-          </a:p>
-          <a:p>
-            <a:pPr lvl="0" marL="457200" indent="-228600">
-              <a:buFont typeface="Calibri"/>
-              <a:spcAft>
-                <a:spcPts val="1000"/>
-              </a:spcAft>
-              <a:buSzPct val="100000"/>
-              <a:buChar char="•"/>
-              <a:lnSpc>
-                <a:spcPts val="2200"/>
-              </a:lnSpc>
-            </a:pPr>
-            <a:r>
-              <a:rPr sz="2000" b="0">
-                <a:solidFill>
-                  <a:srgbClr val="333333"/>
-                </a:solidFill>
-                <a:latin typeface="Calibri"/>
-              </a:rPr>
-              <a:t>Load the starter graph, run the algorithm once</a:t>
-            </a:r>
-          </a:p>
-          <a:p>
-            <a:pPr lvl="0" marL="457200" indent="-228600">
-              <a:buFont typeface="Calibri"/>
-              <a:spcAft>
-                <a:spcPts val="1000"/>
-              </a:spcAft>
-              <a:buSzPct val="100000"/>
-              <a:buChar char="•"/>
-              <a:lnSpc>
-                <a:spcPts val="2200"/>
-              </a:lnSpc>
-            </a:pPr>
-            <a:r>
-              <a:rPr sz="2000" b="0">
-                <a:solidFill>
-                  <a:srgbClr val="333333"/>
-                </a:solidFill>
-                <a:latin typeface="Calibri"/>
-              </a:rPr>
-              <a:t>Work the challenges that lock the goldens</a:t>
-            </a:r>
-          </a:p>
-        </p:txBody>
-      </p:sp>
-      <p:sp>
-        <p:nvSpPr>
-          <p:cNvPr id="4" name="TextBox 3"/>
-          <p:cNvSpPr txBox="1"/>
-          <p:nvPr/>
-        </p:nvSpPr>
-        <p:spPr>
-          <a:xfrm>
-            <a:off x="548640" y="6355080"/>
-            <a:ext cx="11064240" cy="320040"/>
-          </a:xfrm>
-          <a:prstGeom prst="rect">
-            <a:avLst/>
-          </a:prstGeom>
-          <a:noFill/>
-        </p:spPr>
-        <p:txBody>
-          <a:bodyPr wrap="square">
-            <a:noAutofit/>
-          </a:bodyPr>
-          <a:lstStyle/>
-          <a:p>
-            <a:pPr algn="r">
-              <a:lnSpc>
-                <a:spcPts val="2200"/>
-              </a:lnSpc>
-              <a:defRPr sz="1000" b="0">
-                <a:solidFill>
-                  <a:srgbClr val="666666"/>
-                </a:solidFill>
-                <a:latin typeface="Calibri"/>
-              </a:defRPr>
-            </a:pPr>
-            <a:r>
-              <a:t>learn_partitioning — 03 fm partition</a:t>
-            </a:r>
-          </a:p>
-        </p:txBody>
-      </p:sp>
-    </p:spTree>
-  </p:cSld>
-  <p:clrMapOvr>
-    <a:masterClrMapping/>
-  </p:clrMapOvr>
-</p:sld>
-</file>
-
-<file path=ppt/slides/slide9.xml><?xml version="1.0" encoding="utf-8"?>
-<p:sld xmlns:a="http://schemas.openxmlformats.org/drawingml/2006/main" xmlns:p="http://schemas.openxmlformats.org/presentationml/2006/main" xmlns:r="http://schemas.openxmlformats.org/officeDocument/2006/relationships">
-  <p:cSld>
-    <p:spTree>
-      <p:nvGrpSpPr>
-        <p:cNvPr id="1" name=""/>
-        <p:cNvGrpSpPr/>
-        <p:nvPr/>
-      </p:nvGrpSpPr>
-      <p:grpSpPr/>
-      <p:sp>
-        <p:nvSpPr>
-          <p:cNvPr id="2" name="TextBox 1"/>
-          <p:cNvSpPr txBox="1"/>
-          <p:nvPr/>
-        </p:nvSpPr>
-        <p:spPr>
-          <a:xfrm>
-            <a:off x="548640" y="411480"/>
-            <a:ext cx="11064240" cy="777240"/>
-          </a:xfrm>
-          <a:prstGeom prst="rect">
-            <a:avLst/>
-          </a:prstGeom>
-          <a:noFill/>
-        </p:spPr>
-        <p:txBody>
-          <a:bodyPr wrap="square">
-            <a:noAutofit/>
-          </a:bodyPr>
-          <a:lstStyle/>
-          <a:p>
-            <a:pPr>
-              <a:lnSpc>
-                <a:spcPts val="2200"/>
-              </a:lnSpc>
-            </a:pPr>
-            <a:r>
-              <a:rPr sz="2800" b="1">
-                <a:solidFill>
-                  <a:srgbClr val="1A1A2E"/>
-                </a:solidFill>
-                <a:latin typeface="Calibri"/>
-              </a:rPr>
-              <a:t>Implement track</a:t>
-            </a:r>
-          </a:p>
-        </p:txBody>
-      </p:sp>
-      <p:sp>
-        <p:nvSpPr>
-          <p:cNvPr id="3" name="TextBox 2"/>
-          <p:cNvSpPr txBox="1"/>
-          <p:nvPr/>
-        </p:nvSpPr>
-        <p:spPr>
-          <a:xfrm>
-            <a:off x="548640" y="1234440"/>
-            <a:ext cx="11064240" cy="4937760"/>
-          </a:xfrm>
-          <a:prstGeom prst="rect">
-            <a:avLst/>
-          </a:prstGeom>
-          <a:noFill/>
-        </p:spPr>
-        <p:txBody>
-          <a:bodyPr wrap="square">
-            <a:noAutofit/>
-          </a:bodyPr>
-          <a:lstStyle/>
-          <a:p>
-            <a:pPr lvl="0" marL="457200" indent="-228600">
-              <a:buFont typeface="Calibri"/>
-              <a:spcAft>
-                <a:spcPts val="1000"/>
-              </a:spcAft>
-              <a:buSzPct val="100000"/>
-              <a:buChar char="•"/>
-              <a:lnSpc>
-                <a:spcPts val="2200"/>
-              </a:lnSpc>
-            </a:pPr>
-            <a:r>
-              <a:rPr sz="2000" b="0">
-                <a:solidFill>
-                  <a:srgbClr val="333333"/>
-                </a:solidFill>
-                <a:latin typeface="Calibri"/>
-              </a:rPr>
-              <a:t>In the implement track, open this module’s examples and the course `common/` solvers</a:t>
-            </a:r>
-          </a:p>
-          <a:p>
-            <a:pPr lvl="0" marL="457200" indent="-228600">
-              <a:buFont typeface="Calibri"/>
-              <a:spcAft>
-                <a:spcPts val="1000"/>
-              </a:spcAft>
-              <a:buSzPct val="100000"/>
-              <a:buChar char="•"/>
-              <a:lnSpc>
-                <a:spcPts val="2200"/>
-              </a:lnSpc>
-            </a:pPr>
-            <a:r>
-              <a:rPr sz="2000" b="0">
-                <a:solidFill>
-                  <a:srgbClr val="333333"/>
-                </a:solidFill>
-                <a:latin typeface="Calibri"/>
-              </a:rPr>
-              <a:t>Parse the tiny graph, run the algorithm with a deterministic seed</a:t>
-            </a:r>
-          </a:p>
-          <a:p>
-            <a:pPr lvl="0" marL="457200" indent="-228600">
-              <a:buFont typeface="Calibri"/>
-              <a:spcAft>
-                <a:spcPts val="1000"/>
-              </a:spcAft>
-              <a:buSzPct val="100000"/>
-              <a:buChar char="•"/>
-              <a:lnSpc>
-                <a:spcPts val="2200"/>
-              </a:lnSpc>
-            </a:pPr>
-            <a:r>
-              <a:rPr sz="2000" b="0">
-                <a:solidFill>
-                  <a:srgbClr val="333333"/>
-                </a:solidFill>
-                <a:latin typeface="Calibri"/>
-              </a:rPr>
-              <a:t>Match the browser goldens before you claim the checklist</a:t>
-            </a:r>
-          </a:p>
-        </p:txBody>
-      </p:sp>
-      <p:sp>
-        <p:nvSpPr>
-          <p:cNvPr id="4" name="TextBox 3"/>
           <p:cNvSpPr txBox="1"/>
           <p:nvPr/>
         </p:nvSpPr>
